--- a/汇报/深圳大学组会汇报7-4.pptx
+++ b/汇报/深圳大学组会汇报7-4.pptx
@@ -223,7 +223,7 @@
           <a:p>
             <a:fld id="{700F6B53-9E3B-4C54-8733-630783A95104}" type="datetimeFigureOut">
               <a:rPr lang="zh-CN" altLang="en-US" smtClean="0"/>
-              <a:t>2026/7/4</a:t>
+              <a:t>2026/7/17</a:t>
             </a:fld>
             <a:endParaRPr lang="zh-CN" altLang="en-US"/>
           </a:p>
@@ -388,7 +388,7 @@
           <a:p>
             <a:fld id="{3C01D096-FAED-4D1A-B352-C58DC2C3D816}" type="datetimeFigureOut">
               <a:rPr lang="zh-CN" altLang="en-US" smtClean="0"/>
-              <a:t>2026/7/4</a:t>
+              <a:t>2026/7/17</a:t>
             </a:fld>
             <a:endParaRPr lang="zh-CN" altLang="en-US"/>
           </a:p>
@@ -1753,7 +1753,7 @@
           <a:p>
             <a:fld id="{07CF0210-9EFB-4FBE-AADD-CE66351048B3}" type="datetimeFigureOut">
               <a:rPr lang="zh-CN" altLang="en-US" smtClean="0"/>
-              <a:t>2026/7/4</a:t>
+              <a:t>2026/7/17</a:t>
             </a:fld>
             <a:endParaRPr lang="zh-CN" altLang="en-US"/>
           </a:p>
@@ -1989,7 +1989,7 @@
           <a:p>
             <a:fld id="{07CF0210-9EFB-4FBE-AADD-CE66351048B3}" type="datetimeFigureOut">
               <a:rPr lang="zh-CN" altLang="en-US" smtClean="0"/>
-              <a:t>2026/7/4</a:t>
+              <a:t>2026/7/17</a:t>
             </a:fld>
             <a:endParaRPr lang="zh-CN" altLang="en-US"/>
           </a:p>
@@ -2360,7 +2360,7 @@
           <a:p>
             <a:fld id="{07CF0210-9EFB-4FBE-AADD-CE66351048B3}" type="datetimeFigureOut">
               <a:rPr lang="zh-CN" altLang="en-US" smtClean="0"/>
-              <a:t>2026/7/4</a:t>
+              <a:t>2026/7/17</a:t>
             </a:fld>
             <a:endParaRPr lang="zh-CN" altLang="en-US"/>
           </a:p>
@@ -2484,7 +2484,7 @@
           <a:p>
             <a:fld id="{07CF0210-9EFB-4FBE-AADD-CE66351048B3}" type="datetimeFigureOut">
               <a:rPr lang="zh-CN" altLang="en-US" smtClean="0"/>
-              <a:t>2026/7/4</a:t>
+              <a:t>2026/7/17</a:t>
             </a:fld>
             <a:endParaRPr lang="zh-CN" altLang="en-US"/>
           </a:p>
@@ -2586,7 +2586,7 @@
           <a:p>
             <a:fld id="{07CF0210-9EFB-4FBE-AADD-CE66351048B3}" type="datetimeFigureOut">
               <a:rPr lang="zh-CN" altLang="en-US" smtClean="0"/>
-              <a:t>2026/7/4</a:t>
+              <a:t>2026/7/17</a:t>
             </a:fld>
             <a:endParaRPr lang="zh-CN" altLang="en-US"/>
           </a:p>
@@ -2868,7 +2868,7 @@
           <a:p>
             <a:fld id="{07CF0210-9EFB-4FBE-AADD-CE66351048B3}" type="datetimeFigureOut">
               <a:rPr lang="zh-CN" altLang="en-US" smtClean="0"/>
-              <a:t>2026/7/4</a:t>
+              <a:t>2026/7/17</a:t>
             </a:fld>
             <a:endParaRPr lang="zh-CN" altLang="en-US"/>
           </a:p>
@@ -3127,7 +3127,7 @@
           <a:p>
             <a:fld id="{07CF0210-9EFB-4FBE-AADD-CE66351048B3}" type="datetimeFigureOut">
               <a:rPr lang="zh-CN" altLang="en-US" smtClean="0"/>
-              <a:t>2026/7/4</a:t>
+              <a:t>2026/7/17</a:t>
             </a:fld>
             <a:endParaRPr lang="zh-CN" altLang="en-US"/>
           </a:p>
@@ -3302,7 +3302,7 @@
           <a:p>
             <a:fld id="{07CF0210-9EFB-4FBE-AADD-CE66351048B3}" type="datetimeFigureOut">
               <a:rPr lang="zh-CN" altLang="en-US" smtClean="0"/>
-              <a:t>2026/7/4</a:t>
+              <a:t>2026/7/17</a:t>
             </a:fld>
             <a:endParaRPr lang="zh-CN" altLang="en-US"/>
           </a:p>
@@ -3487,7 +3487,7 @@
           <a:p>
             <a:fld id="{07CF0210-9EFB-4FBE-AADD-CE66351048B3}" type="datetimeFigureOut">
               <a:rPr lang="zh-CN" altLang="en-US" smtClean="0"/>
-              <a:t>2026/7/4</a:t>
+              <a:t>2026/7/17</a:t>
             </a:fld>
             <a:endParaRPr lang="zh-CN" altLang="en-US"/>
           </a:p>
@@ -6344,7 +6344,7 @@
           <a:p>
             <a:fld id="{735682A8-D6B6-4FDA-A495-4D437BAFBB60}" type="datetimeFigureOut">
               <a:rPr lang="zh-CN" altLang="en-US" smtClean="0"/>
-              <a:t>2026/7/4</a:t>
+              <a:t>2026/7/17</a:t>
             </a:fld>
             <a:endParaRPr lang="zh-CN" altLang="en-US"/>
           </a:p>
@@ -6557,7 +6557,7 @@
           <a:p>
             <a:fld id="{07CF0210-9EFB-4FBE-AADD-CE66351048B3}" type="datetimeFigureOut">
               <a:rPr lang="zh-CN" altLang="en-US" smtClean="0"/>
-              <a:t>2026/7/4</a:t>
+              <a:t>2026/7/17</a:t>
             </a:fld>
             <a:endParaRPr lang="zh-CN" altLang="en-US"/>
           </a:p>
@@ -6732,7 +6732,7 @@
           <a:p>
             <a:fld id="{07CF0210-9EFB-4FBE-AADD-CE66351048B3}" type="datetimeFigureOut">
               <a:rPr lang="zh-CN" altLang="en-US" smtClean="0"/>
-              <a:t>2026/7/4</a:t>
+              <a:t>2026/7/17</a:t>
             </a:fld>
             <a:endParaRPr lang="zh-CN" altLang="en-US"/>
           </a:p>
@@ -22798,7 +22798,7 @@
           <a:p>
             <a:fld id="{07CF0210-9EFB-4FBE-AADD-CE66351048B3}" type="datetimeFigureOut">
               <a:rPr lang="zh-CN" altLang="en-US" smtClean="0"/>
-              <a:t>2026/7/4</a:t>
+              <a:t>2026/7/17</a:t>
             </a:fld>
             <a:endParaRPr lang="zh-CN" altLang="en-US"/>
           </a:p>
@@ -23254,11 +23254,11 @@
   <p:clrMapOvr>
     <a:masterClrMapping/>
   </p:clrMapOvr>
-  <mc:AlternateContent xmlns:mc="http://schemas.openxmlformats.org/markup-compatibility/2006">
-    <mc:Choice xmlns:p14="http://schemas.microsoft.com/office/powerpoint/2010/main" Requires="p14">
+  <mc:AlternateContent xmlns:mc="http://schemas.openxmlformats.org/markup-compatibility/2006" xmlns:p14="http://schemas.microsoft.com/office/powerpoint/2010/main">
+    <mc:Choice Requires="p14">
       <p:transition p14:dur="0" advTm="3000"/>
     </mc:Choice>
-    <mc:Fallback>
+    <mc:Fallback xmlns="">
       <p:transition advTm="3000"/>
     </mc:Fallback>
   </mc:AlternateContent>
@@ -23469,11 +23469,11 @@
   <p:clrMapOvr>
     <a:masterClrMapping/>
   </p:clrMapOvr>
-  <mc:AlternateContent xmlns:mc="http://schemas.openxmlformats.org/markup-compatibility/2006">
-    <mc:Choice xmlns:p14="http://schemas.microsoft.com/office/powerpoint/2010/main" Requires="p14">
+  <mc:AlternateContent xmlns:mc="http://schemas.openxmlformats.org/markup-compatibility/2006" xmlns:p14="http://schemas.microsoft.com/office/powerpoint/2010/main">
+    <mc:Choice Requires="p14">
       <p:transition p14:dur="0" advTm="3000"/>
     </mc:Choice>
-    <mc:Fallback>
+    <mc:Fallback xmlns="">
       <p:transition advTm="3000"/>
     </mc:Fallback>
   </mc:AlternateContent>
@@ -24056,11 +24056,11 @@
   <p:clrMapOvr>
     <a:masterClrMapping/>
   </p:clrMapOvr>
-  <mc:AlternateContent xmlns:mc="http://schemas.openxmlformats.org/markup-compatibility/2006">
-    <mc:Choice xmlns:p14="http://schemas.microsoft.com/office/powerpoint/2010/main" Requires="p14">
+  <mc:AlternateContent xmlns:mc="http://schemas.openxmlformats.org/markup-compatibility/2006" xmlns:p14="http://schemas.microsoft.com/office/powerpoint/2010/main">
+    <mc:Choice Requires="p14">
       <p:transition p14:dur="0" advTm="3000"/>
     </mc:Choice>
-    <mc:Fallback>
+    <mc:Fallback xmlns="">
       <p:transition advTm="3000"/>
     </mc:Fallback>
   </mc:AlternateContent>
@@ -24130,11 +24130,11 @@
   <p:clrMapOvr>
     <a:masterClrMapping/>
   </p:clrMapOvr>
-  <mc:AlternateContent xmlns:mc="http://schemas.openxmlformats.org/markup-compatibility/2006">
-    <mc:Choice xmlns:p14="http://schemas.microsoft.com/office/powerpoint/2010/main" Requires="p14">
+  <mc:AlternateContent xmlns:mc="http://schemas.openxmlformats.org/markup-compatibility/2006" xmlns:p14="http://schemas.microsoft.com/office/powerpoint/2010/main">
+    <mc:Choice Requires="p14">
       <p:transition p14:dur="0" advTm="3000"/>
     </mc:Choice>
-    <mc:Fallback>
+    <mc:Fallback xmlns="">
       <p:transition advTm="3000"/>
     </mc:Fallback>
   </mc:AlternateContent>
@@ -24362,11 +24362,11 @@
   <p:clrMapOvr>
     <a:masterClrMapping/>
   </p:clrMapOvr>
-  <mc:AlternateContent xmlns:mc="http://schemas.openxmlformats.org/markup-compatibility/2006">
-    <mc:Choice xmlns:p14="http://schemas.microsoft.com/office/powerpoint/2010/main" Requires="p14">
+  <mc:AlternateContent xmlns:mc="http://schemas.openxmlformats.org/markup-compatibility/2006" xmlns:p14="http://schemas.microsoft.com/office/powerpoint/2010/main">
+    <mc:Choice Requires="p14">
       <p:transition p14:dur="0" advTm="3000"/>
     </mc:Choice>
-    <mc:Fallback>
+    <mc:Fallback xmlns="">
       <p:transition advTm="3000"/>
     </mc:Fallback>
   </mc:AlternateContent>
@@ -24690,11 +24690,11 @@
   <p:clrMapOvr>
     <a:masterClrMapping/>
   </p:clrMapOvr>
-  <mc:AlternateContent xmlns:mc="http://schemas.openxmlformats.org/markup-compatibility/2006">
-    <mc:Choice xmlns:p14="http://schemas.microsoft.com/office/powerpoint/2010/main" Requires="p14">
+  <mc:AlternateContent xmlns:mc="http://schemas.openxmlformats.org/markup-compatibility/2006" xmlns:p14="http://schemas.microsoft.com/office/powerpoint/2010/main">
+    <mc:Choice Requires="p14">
       <p:transition p14:dur="0" advTm="3000"/>
     </mc:Choice>
-    <mc:Fallback>
+    <mc:Fallback xmlns="">
       <p:transition advTm="3000"/>
     </mc:Fallback>
   </mc:AlternateContent>
@@ -24876,11 +24876,11 @@
   <p:clrMapOvr>
     <a:masterClrMapping/>
   </p:clrMapOvr>
-  <mc:AlternateContent xmlns:mc="http://schemas.openxmlformats.org/markup-compatibility/2006">
-    <mc:Choice xmlns:p14="http://schemas.microsoft.com/office/powerpoint/2010/main" Requires="p14">
+  <mc:AlternateContent xmlns:mc="http://schemas.openxmlformats.org/markup-compatibility/2006" xmlns:p14="http://schemas.microsoft.com/office/powerpoint/2010/main">
+    <mc:Choice Requires="p14">
       <p:transition p14:dur="0" advTm="3000"/>
     </mc:Choice>
-    <mc:Fallback>
+    <mc:Fallback xmlns="">
       <p:transition advTm="3000"/>
     </mc:Fallback>
   </mc:AlternateContent>
@@ -25071,11 +25071,11 @@
   <p:clrMapOvr>
     <a:masterClrMapping/>
   </p:clrMapOvr>
-  <mc:AlternateContent xmlns:mc="http://schemas.openxmlformats.org/markup-compatibility/2006">
-    <mc:Choice xmlns:p14="http://schemas.microsoft.com/office/powerpoint/2010/main" Requires="p14">
+  <mc:AlternateContent xmlns:mc="http://schemas.openxmlformats.org/markup-compatibility/2006" xmlns:p14="http://schemas.microsoft.com/office/powerpoint/2010/main">
+    <mc:Choice Requires="p14">
       <p:transition p14:dur="0" advTm="3000"/>
     </mc:Choice>
-    <mc:Fallback>
+    <mc:Fallback xmlns="">
       <p:transition advTm="3000"/>
     </mc:Fallback>
   </mc:AlternateContent>
@@ -25104,11 +25104,11 @@
   <p:clrMapOvr>
     <a:masterClrMapping/>
   </p:clrMapOvr>
-  <mc:AlternateContent xmlns:mc="http://schemas.openxmlformats.org/markup-compatibility/2006">
-    <mc:Choice xmlns:p14="http://schemas.microsoft.com/office/powerpoint/2010/main" Requires="p14">
+  <mc:AlternateContent xmlns:mc="http://schemas.openxmlformats.org/markup-compatibility/2006" xmlns:p14="http://schemas.microsoft.com/office/powerpoint/2010/main">
+    <mc:Choice Requires="p14">
       <p:transition p14:dur="0" advTm="3000"/>
     </mc:Choice>
-    <mc:Fallback>
+    <mc:Fallback xmlns="">
       <p:transition advTm="3000"/>
     </mc:Fallback>
   </mc:AlternateContent>
@@ -25967,11 +25967,11 @@
   <p:clrMapOvr>
     <a:masterClrMapping/>
   </p:clrMapOvr>
-  <mc:AlternateContent xmlns:mc="http://schemas.openxmlformats.org/markup-compatibility/2006">
-    <mc:Choice xmlns:p14="http://schemas.microsoft.com/office/powerpoint/2010/main" Requires="p14">
+  <mc:AlternateContent xmlns:mc="http://schemas.openxmlformats.org/markup-compatibility/2006" xmlns:p14="http://schemas.microsoft.com/office/powerpoint/2010/main">
+    <mc:Choice Requires="p14">
       <p:transition p14:dur="0" advTm="3000"/>
     </mc:Choice>
-    <mc:Fallback>
+    <mc:Fallback xmlns="">
       <p:transition advTm="3000"/>
     </mc:Fallback>
   </mc:AlternateContent>
@@ -26382,11 +26382,11 @@
   <p:clrMapOvr>
     <a:masterClrMapping/>
   </p:clrMapOvr>
-  <mc:AlternateContent xmlns:mc="http://schemas.openxmlformats.org/markup-compatibility/2006">
-    <mc:Choice xmlns:p14="http://schemas.microsoft.com/office/powerpoint/2010/main" Requires="p14">
+  <mc:AlternateContent xmlns:mc="http://schemas.openxmlformats.org/markup-compatibility/2006" xmlns:p14="http://schemas.microsoft.com/office/powerpoint/2010/main">
+    <mc:Choice Requires="p14">
       <p:transition p14:dur="0" advTm="3000"/>
     </mc:Choice>
-    <mc:Fallback>
+    <mc:Fallback xmlns="">
       <p:transition advTm="3000"/>
     </mc:Fallback>
   </mc:AlternateContent>
@@ -26522,11 +26522,11 @@
   <p:clrMapOvr>
     <a:masterClrMapping/>
   </p:clrMapOvr>
-  <mc:AlternateContent xmlns:mc="http://schemas.openxmlformats.org/markup-compatibility/2006">
-    <mc:Choice xmlns:p14="http://schemas.microsoft.com/office/powerpoint/2010/main" Requires="p14">
+  <mc:AlternateContent xmlns:mc="http://schemas.openxmlformats.org/markup-compatibility/2006" xmlns:p14="http://schemas.microsoft.com/office/powerpoint/2010/main">
+    <mc:Choice Requires="p14">
       <p:transition p14:dur="0" advTm="3000"/>
     </mc:Choice>
-    <mc:Fallback>
+    <mc:Fallback xmlns="">
       <p:transition advTm="3000"/>
     </mc:Fallback>
   </mc:AlternateContent>
@@ -26694,11 +26694,11 @@
   <p:clrMapOvr>
     <a:masterClrMapping/>
   </p:clrMapOvr>
-  <mc:AlternateContent xmlns:mc="http://schemas.openxmlformats.org/markup-compatibility/2006">
-    <mc:Choice xmlns:p14="http://schemas.microsoft.com/office/powerpoint/2010/main" Requires="p14">
+  <mc:AlternateContent xmlns:mc="http://schemas.openxmlformats.org/markup-compatibility/2006" xmlns:p14="http://schemas.microsoft.com/office/powerpoint/2010/main">
+    <mc:Choice Requires="p14">
       <p:transition p14:dur="0" advTm="3000"/>
     </mc:Choice>
-    <mc:Fallback>
+    <mc:Fallback xmlns="">
       <p:transition advTm="3000"/>
     </mc:Fallback>
   </mc:AlternateContent>
@@ -27839,11 +27839,11 @@
   <p:clrMapOvr>
     <a:masterClrMapping/>
   </p:clrMapOvr>
-  <mc:AlternateContent xmlns:mc="http://schemas.openxmlformats.org/markup-compatibility/2006">
-    <mc:Choice xmlns:p14="http://schemas.microsoft.com/office/powerpoint/2010/main" Requires="p14">
+  <mc:AlternateContent xmlns:mc="http://schemas.openxmlformats.org/markup-compatibility/2006" xmlns:p14="http://schemas.microsoft.com/office/powerpoint/2010/main">
+    <mc:Choice Requires="p14">
       <p:transition p14:dur="0" advTm="3000"/>
     </mc:Choice>
-    <mc:Fallback>
+    <mc:Fallback xmlns="">
       <p:transition advTm="3000"/>
     </mc:Fallback>
   </mc:AlternateContent>
@@ -28282,11 +28282,11 @@
   <p:clrMapOvr>
     <a:masterClrMapping/>
   </p:clrMapOvr>
-  <mc:AlternateContent xmlns:mc="http://schemas.openxmlformats.org/markup-compatibility/2006">
-    <mc:Choice xmlns:p14="http://schemas.microsoft.com/office/powerpoint/2010/main" Requires="p14">
+  <mc:AlternateContent xmlns:mc="http://schemas.openxmlformats.org/markup-compatibility/2006" xmlns:p14="http://schemas.microsoft.com/office/powerpoint/2010/main">
+    <mc:Choice Requires="p14">
       <p:transition p14:dur="0" advTm="3000"/>
     </mc:Choice>
-    <mc:Fallback>
+    <mc:Fallback xmlns="">
       <p:transition advTm="3000"/>
     </mc:Fallback>
   </mc:AlternateContent>
@@ -28933,11 +28933,11 @@
   <p:clrMapOvr>
     <a:masterClrMapping/>
   </p:clrMapOvr>
-  <mc:AlternateContent xmlns:mc="http://schemas.openxmlformats.org/markup-compatibility/2006">
-    <mc:Choice xmlns:p14="http://schemas.microsoft.com/office/powerpoint/2010/main" Requires="p14">
+  <mc:AlternateContent xmlns:mc="http://schemas.openxmlformats.org/markup-compatibility/2006" xmlns:p14="http://schemas.microsoft.com/office/powerpoint/2010/main">
+    <mc:Choice Requires="p14">
       <p:transition p14:dur="0" advTm="3000"/>
     </mc:Choice>
-    <mc:Fallback>
+    <mc:Fallback xmlns="">
       <p:transition advTm="3000"/>
     </mc:Fallback>
   </mc:AlternateContent>
@@ -29115,11 +29115,11 @@
   <p:clrMapOvr>
     <a:masterClrMapping/>
   </p:clrMapOvr>
-  <mc:AlternateContent xmlns:mc="http://schemas.openxmlformats.org/markup-compatibility/2006">
-    <mc:Choice xmlns:p14="http://schemas.microsoft.com/office/powerpoint/2010/main" Requires="p14">
+  <mc:AlternateContent xmlns:mc="http://schemas.openxmlformats.org/markup-compatibility/2006" xmlns:p14="http://schemas.microsoft.com/office/powerpoint/2010/main">
+    <mc:Choice Requires="p14">
       <p:transition p14:dur="0" advTm="3000"/>
     </mc:Choice>
-    <mc:Fallback>
+    <mc:Fallback xmlns="">
       <p:transition advTm="3000"/>
     </mc:Fallback>
   </mc:AlternateContent>
